--- a/neerlandais1/powerpoints/Module_21_Groot_of_grote.pptx
+++ b/neerlandais1/powerpoints/Module_21_Groot_of_grote.pptx
@@ -133,18 +133,18 @@
   <p:extLst>
     <p:ext uri="{521415D9-36F7-43E2-AB2F-B90AF26B5E84}">
       <p14:sectionLst xmlns:p14="http://schemas.microsoft.com/office/powerpoint/2010/main">
-        <p14:section name="Ouverture" id="{71102405-b020-bf4a-e895-da29c35507c2}">
+        <p14:section name="Ouverture" id="{69495d25-6539-56ed-c501-97f334d68682}">
           <p14:sldIdLst>
             <p14:sldId id="256"/>
           </p14:sldIdLst>
         </p14:section>
-        <p14:section name="Découvrir" id="{014e9d48-8e79-0137-9945-19b1c1af4862}">
+        <p14:section name="Découvrir" id="{fcfb6c1d-9508-120d-bb0f-9aae6ce0289a}">
           <p14:sldIdLst>
             <p14:sldId id="257"/>
             <p14:sldId id="258"/>
           </p14:sldIdLst>
         </p14:section>
-        <p14:section name="Comprendre" id="{236d1265-e320-dc85-9858-f84e5e295a5b}">
+        <p14:section name="Comprendre" id="{0e693f92-4269-75f8-ed9b-96d95bdc8dcc}">
           <p14:sldIdLst>
             <p14:sldId id="259"/>
             <p14:sldId id="260"/>
@@ -158,7 +158,7 @@
             <p14:sldId id="268"/>
           </p14:sldIdLst>
         </p14:section>
-        <p14:section name="JIJ NU ! — Oefeningen" id="{fddb5a30-6958-f422-b2da-db6d8b2424b5}">
+        <p14:section name="JIJ NU ! — Oefeningen" id="{9ac8a86b-49af-e52e-de8e-8ef2202c9f03}">
           <p14:sldIdLst>
             <p14:sldId id="269"/>
             <p14:sldId id="270"/>
@@ -175,7 +175,7 @@
             <p14:sldId id="281"/>
           </p14:sldIdLst>
         </p14:section>
-        <p14:section name="Clôture" id="{09ea91ef-47c0-493e-ac63-07c71ec5fa47}">
+        <p14:section name="Clôture" id="{89daa868-c43a-eec0-c755-e18175a62299}">
           <p14:sldIdLst>
             <p14:sldId id="282"/>
           </p14:sldIdLst>
@@ -3806,7 +3806,7 @@
                   <a:srgbClr val="FFFFFF"/>
                 </a:solidFill>
               </a:rPr>
-              <a:t>MODULE 21 / 24</a:t>
+              <a:t>MODULE 21 / 29</a:t>
             </a:r>
             <a:endParaRPr lang="en-US" sz="1400" dirty="0"/>
           </a:p>

--- a/neerlandais1/powerpoints/Module_21_Groot_of_grote.pptx
+++ b/neerlandais1/powerpoints/Module_21_Groot_of_grote.pptx
@@ -133,18 +133,18 @@
   <p:extLst>
     <p:ext uri="{521415D9-36F7-43E2-AB2F-B90AF26B5E84}">
       <p14:sectionLst xmlns:p14="http://schemas.microsoft.com/office/powerpoint/2010/main">
-        <p14:section name="Ouverture" id="{69495d25-6539-56ed-c501-97f334d68682}">
+        <p14:section name="Ouverture" id="{4e08a696-b064-9aa6-759b-137ab1f253d4}">
           <p14:sldIdLst>
             <p14:sldId id="256"/>
           </p14:sldIdLst>
         </p14:section>
-        <p14:section name="Découvrir" id="{fcfb6c1d-9508-120d-bb0f-9aae6ce0289a}">
+        <p14:section name="Découvrir" id="{0746123e-7498-d4a3-5085-5c7493cc44c6}">
           <p14:sldIdLst>
             <p14:sldId id="257"/>
             <p14:sldId id="258"/>
           </p14:sldIdLst>
         </p14:section>
-        <p14:section name="Comprendre" id="{0e693f92-4269-75f8-ed9b-96d95bdc8dcc}">
+        <p14:section name="Comprendre" id="{f2ffe71b-ab8a-4d47-c964-1488d4108f3d}">
           <p14:sldIdLst>
             <p14:sldId id="259"/>
             <p14:sldId id="260"/>
@@ -158,7 +158,7 @@
             <p14:sldId id="268"/>
           </p14:sldIdLst>
         </p14:section>
-        <p14:section name="JIJ NU ! — Oefeningen" id="{9ac8a86b-49af-e52e-de8e-8ef2202c9f03}">
+        <p14:section name="JIJ NU ! — Oefeningen" id="{756ed193-23a7-726e-5851-bf25cdf0dd0d}">
           <p14:sldIdLst>
             <p14:sldId id="269"/>
             <p14:sldId id="270"/>
@@ -175,7 +175,7 @@
             <p14:sldId id="281"/>
           </p14:sldIdLst>
         </p14:section>
-        <p14:section name="Clôture" id="{89daa868-c43a-eec0-c755-e18175a62299}">
+        <p14:section name="Clôture" id="{76ad8f54-cc43-9773-21c6-2cf01e3d3a4b}">
           <p14:sldIdLst>
             <p14:sldId id="282"/>
           </p14:sldIdLst>
@@ -3806,7 +3806,7 @@
                   <a:srgbClr val="FFFFFF"/>
                 </a:solidFill>
               </a:rPr>
-              <a:t>MODULE 21 / 29</a:t>
+              <a:t>MODULE 21 / 32</a:t>
             </a:r>
             <a:endParaRPr lang="en-US" sz="1400" dirty="0"/>
           </a:p>

--- a/neerlandais1/powerpoints/Module_21_Groot_of_grote.pptx
+++ b/neerlandais1/powerpoints/Module_21_Groot_of_grote.pptx
@@ -133,18 +133,18 @@
   <p:extLst>
     <p:ext uri="{521415D9-36F7-43E2-AB2F-B90AF26B5E84}">
       <p14:sectionLst xmlns:p14="http://schemas.microsoft.com/office/powerpoint/2010/main">
-        <p14:section name="Ouverture" id="{4e08a696-b064-9aa6-759b-137ab1f253d4}">
+        <p14:section name="Ouverture" id="{e4c6a26b-29ce-636f-bbb3-d3212b5acdc9}">
           <p14:sldIdLst>
             <p14:sldId id="256"/>
           </p14:sldIdLst>
         </p14:section>
-        <p14:section name="Découvrir" id="{0746123e-7498-d4a3-5085-5c7493cc44c6}">
+        <p14:section name="Découvrir" id="{7b7cd385-6526-674f-5c0b-ebe9e98d4454}">
           <p14:sldIdLst>
             <p14:sldId id="257"/>
             <p14:sldId id="258"/>
           </p14:sldIdLst>
         </p14:section>
-        <p14:section name="Comprendre" id="{f2ffe71b-ab8a-4d47-c964-1488d4108f3d}">
+        <p14:section name="Comprendre" id="{1f34cc33-ac03-7e69-f0ec-80bf74b488fd}">
           <p14:sldIdLst>
             <p14:sldId id="259"/>
             <p14:sldId id="260"/>
@@ -158,7 +158,7 @@
             <p14:sldId id="268"/>
           </p14:sldIdLst>
         </p14:section>
-        <p14:section name="JIJ NU ! — Oefeningen" id="{756ed193-23a7-726e-5851-bf25cdf0dd0d}">
+        <p14:section name="JIJ NU ! — Oefeningen" id="{d76369af-189f-eb7c-1fd8-03cd05a5ee6f}">
           <p14:sldIdLst>
             <p14:sldId id="269"/>
             <p14:sldId id="270"/>
@@ -175,7 +175,7 @@
             <p14:sldId id="281"/>
           </p14:sldIdLst>
         </p14:section>
-        <p14:section name="Clôture" id="{76ad8f54-cc43-9773-21c6-2cf01e3d3a4b}">
+        <p14:section name="Clôture" id="{96d292fa-c3d2-9afa-e7da-46bf1eef93ac}">
           <p14:sldIdLst>
             <p14:sldId id="282"/>
           </p14:sldIdLst>

--- a/neerlandais1/powerpoints/Module_21_Groot_of_grote.pptx
+++ b/neerlandais1/powerpoints/Module_21_Groot_of_grote.pptx
@@ -133,18 +133,18 @@
   <p:extLst>
     <p:ext uri="{521415D9-36F7-43E2-AB2F-B90AF26B5E84}">
       <p14:sectionLst xmlns:p14="http://schemas.microsoft.com/office/powerpoint/2010/main">
-        <p14:section name="Ouverture" id="{e4c6a26b-29ce-636f-bbb3-d3212b5acdc9}">
+        <p14:section name="Ouverture" id="{c753a24b-6f83-4c1e-a6f0-55c072444952}">
           <p14:sldIdLst>
             <p14:sldId id="256"/>
           </p14:sldIdLst>
         </p14:section>
-        <p14:section name="Découvrir" id="{7b7cd385-6526-674f-5c0b-ebe9e98d4454}">
+        <p14:section name="Découvrir" id="{3971da4f-8548-1f26-6bdd-f6e1c1cd7196}">
           <p14:sldIdLst>
             <p14:sldId id="257"/>
             <p14:sldId id="258"/>
           </p14:sldIdLst>
         </p14:section>
-        <p14:section name="Comprendre" id="{1f34cc33-ac03-7e69-f0ec-80bf74b488fd}">
+        <p14:section name="Comprendre" id="{5b415f52-67a5-49b5-71a6-8476b567e857}">
           <p14:sldIdLst>
             <p14:sldId id="259"/>
             <p14:sldId id="260"/>
@@ -158,7 +158,7 @@
             <p14:sldId id="268"/>
           </p14:sldIdLst>
         </p14:section>
-        <p14:section name="JIJ NU ! — Oefeningen" id="{d76369af-189f-eb7c-1fd8-03cd05a5ee6f}">
+        <p14:section name="JIJ NU ! — Oefeningen" id="{c5d19034-b6d0-f84c-50f7-4a643e583530}">
           <p14:sldIdLst>
             <p14:sldId id="269"/>
             <p14:sldId id="270"/>
@@ -175,7 +175,7 @@
             <p14:sldId id="281"/>
           </p14:sldIdLst>
         </p14:section>
-        <p14:section name="Clôture" id="{96d292fa-c3d2-9afa-e7da-46bf1eef93ac}">
+        <p14:section name="Clôture" id="{47188522-ca2b-d898-5405-64e9e062b373}">
           <p14:sldIdLst>
             <p14:sldId id="282"/>
           </p14:sldIdLst>

--- a/neerlandais1/powerpoints/Module_21_Groot_of_grote.pptx
+++ b/neerlandais1/powerpoints/Module_21_Groot_of_grote.pptx
@@ -133,18 +133,18 @@
   <p:extLst>
     <p:ext uri="{521415D9-36F7-43E2-AB2F-B90AF26B5E84}">
       <p14:sectionLst xmlns:p14="http://schemas.microsoft.com/office/powerpoint/2010/main">
-        <p14:section name="Ouverture" id="{c753a24b-6f83-4c1e-a6f0-55c072444952}">
+        <p14:section name="Ouverture" id="{8aa50543-f130-8a68-a9b3-a846a673cfe0}">
           <p14:sldIdLst>
             <p14:sldId id="256"/>
           </p14:sldIdLst>
         </p14:section>
-        <p14:section name="Découvrir" id="{3971da4f-8548-1f26-6bdd-f6e1c1cd7196}">
+        <p14:section name="Découvrir" id="{48486697-b464-3b74-8b9b-f3d9d36ac9ee}">
           <p14:sldIdLst>
             <p14:sldId id="257"/>
             <p14:sldId id="258"/>
           </p14:sldIdLst>
         </p14:section>
-        <p14:section name="Comprendre" id="{5b415f52-67a5-49b5-71a6-8476b567e857}">
+        <p14:section name="Comprendre" id="{7b18f2cc-bc3f-073b-f9fa-ef665b984d3f}">
           <p14:sldIdLst>
             <p14:sldId id="259"/>
             <p14:sldId id="260"/>
@@ -158,7 +158,7 @@
             <p14:sldId id="268"/>
           </p14:sldIdLst>
         </p14:section>
-        <p14:section name="JIJ NU ! — Oefeningen" id="{c5d19034-b6d0-f84c-50f7-4a643e583530}">
+        <p14:section name="JIJ NU ! — Oefeningen" id="{006b43e0-dd37-617d-1c0b-9e6bec721f66}">
           <p14:sldIdLst>
             <p14:sldId id="269"/>
             <p14:sldId id="270"/>
@@ -175,7 +175,7 @@
             <p14:sldId id="281"/>
           </p14:sldIdLst>
         </p14:section>
-        <p14:section name="Clôture" id="{47188522-ca2b-d898-5405-64e9e062b373}">
+        <p14:section name="Clôture" id="{296f2012-3182-5a99-8bba-be83a60dcce1}">
           <p14:sldIdLst>
             <p14:sldId id="282"/>
           </p14:sldIdLst>

--- a/neerlandais1/powerpoints/Module_21_Groot_of_grote.pptx
+++ b/neerlandais1/powerpoints/Module_21_Groot_of_grote.pptx
@@ -133,18 +133,18 @@
   <p:extLst>
     <p:ext uri="{521415D9-36F7-43E2-AB2F-B90AF26B5E84}">
       <p14:sectionLst xmlns:p14="http://schemas.microsoft.com/office/powerpoint/2010/main">
-        <p14:section name="Ouverture" id="{8aa50543-f130-8a68-a9b3-a846a673cfe0}">
+        <p14:section name="Ouverture" id="{436ad02b-36bd-1366-f11b-6d41888e029a}">
           <p14:sldIdLst>
             <p14:sldId id="256"/>
           </p14:sldIdLst>
         </p14:section>
-        <p14:section name="Découvrir" id="{48486697-b464-3b74-8b9b-f3d9d36ac9ee}">
+        <p14:section name="Découvrir" id="{c07dbb04-29b7-5fc2-26bf-fbe238317874}">
           <p14:sldIdLst>
             <p14:sldId id="257"/>
             <p14:sldId id="258"/>
           </p14:sldIdLst>
         </p14:section>
-        <p14:section name="Comprendre" id="{7b18f2cc-bc3f-073b-f9fa-ef665b984d3f}">
+        <p14:section name="Comprendre" id="{6272c8bd-49ea-f31e-007d-c766a2e5e2ed}">
           <p14:sldIdLst>
             <p14:sldId id="259"/>
             <p14:sldId id="260"/>
@@ -158,7 +158,7 @@
             <p14:sldId id="268"/>
           </p14:sldIdLst>
         </p14:section>
-        <p14:section name="JIJ NU ! — Oefeningen" id="{006b43e0-dd37-617d-1c0b-9e6bec721f66}">
+        <p14:section name="JIJ NU ! — Oefeningen" id="{d398f38b-2eb4-019e-661c-8293c676c4c9}">
           <p14:sldIdLst>
             <p14:sldId id="269"/>
             <p14:sldId id="270"/>
@@ -175,7 +175,7 @@
             <p14:sldId id="281"/>
           </p14:sldIdLst>
         </p14:section>
-        <p14:section name="Clôture" id="{296f2012-3182-5a99-8bba-be83a60dcce1}">
+        <p14:section name="Clôture" id="{f0eb0dec-1156-1ef0-b80c-04a1293ba984}">
           <p14:sldIdLst>
             <p14:sldId id="282"/>
           </p14:sldIdLst>

--- a/neerlandais1/powerpoints/Module_21_Groot_of_grote.pptx
+++ b/neerlandais1/powerpoints/Module_21_Groot_of_grote.pptx
@@ -133,18 +133,18 @@
   <p:extLst>
     <p:ext uri="{521415D9-36F7-43E2-AB2F-B90AF26B5E84}">
       <p14:sectionLst xmlns:p14="http://schemas.microsoft.com/office/powerpoint/2010/main">
-        <p14:section name="Ouverture" id="{436ad02b-36bd-1366-f11b-6d41888e029a}">
+        <p14:section name="Ouverture" id="{1697ebfd-22e1-437e-032b-4ff09461bcd5}">
           <p14:sldIdLst>
             <p14:sldId id="256"/>
           </p14:sldIdLst>
         </p14:section>
-        <p14:section name="Découvrir" id="{c07dbb04-29b7-5fc2-26bf-fbe238317874}">
+        <p14:section name="Découvrir" id="{de6976f2-b38e-927f-8a03-2835cd6f0db3}">
           <p14:sldIdLst>
             <p14:sldId id="257"/>
             <p14:sldId id="258"/>
           </p14:sldIdLst>
         </p14:section>
-        <p14:section name="Comprendre" id="{6272c8bd-49ea-f31e-007d-c766a2e5e2ed}">
+        <p14:section name="Comprendre" id="{b5a45b1c-48f2-1dfe-41ff-e6ec79a9fc4e}">
           <p14:sldIdLst>
             <p14:sldId id="259"/>
             <p14:sldId id="260"/>
@@ -158,7 +158,7 @@
             <p14:sldId id="268"/>
           </p14:sldIdLst>
         </p14:section>
-        <p14:section name="JIJ NU ! — Oefeningen" id="{d398f38b-2eb4-019e-661c-8293c676c4c9}">
+        <p14:section name="JIJ NU ! — Oefeningen" id="{469315bd-8ec9-1675-10ac-2465e0b30556}">
           <p14:sldIdLst>
             <p14:sldId id="269"/>
             <p14:sldId id="270"/>
@@ -175,7 +175,7 @@
             <p14:sldId id="281"/>
           </p14:sldIdLst>
         </p14:section>
-        <p14:section name="Clôture" id="{f0eb0dec-1156-1ef0-b80c-04a1293ba984}">
+        <p14:section name="Clôture" id="{d6b8cbe6-39b0-154c-28b0-495097189b61}">
           <p14:sldIdLst>
             <p14:sldId id="282"/>
           </p14:sldIdLst>

--- a/neerlandais1/powerpoints/Module_21_Groot_of_grote.pptx
+++ b/neerlandais1/powerpoints/Module_21_Groot_of_grote.pptx
@@ -133,18 +133,18 @@
   <p:extLst>
     <p:ext uri="{521415D9-36F7-43E2-AB2F-B90AF26B5E84}">
       <p14:sectionLst xmlns:p14="http://schemas.microsoft.com/office/powerpoint/2010/main">
-        <p14:section name="Ouverture" id="{1697ebfd-22e1-437e-032b-4ff09461bcd5}">
+        <p14:section name="Ouverture" id="{334c1c4c-690d-6439-0da8-99cab27b901a}">
           <p14:sldIdLst>
             <p14:sldId id="256"/>
           </p14:sldIdLst>
         </p14:section>
-        <p14:section name="Découvrir" id="{de6976f2-b38e-927f-8a03-2835cd6f0db3}">
+        <p14:section name="Découvrir" id="{3689254c-ebe3-dfc9-5e64-8f743693e3de}">
           <p14:sldIdLst>
             <p14:sldId id="257"/>
             <p14:sldId id="258"/>
           </p14:sldIdLst>
         </p14:section>
-        <p14:section name="Comprendre" id="{b5a45b1c-48f2-1dfe-41ff-e6ec79a9fc4e}">
+        <p14:section name="Comprendre" id="{b91b1fe3-1ad6-8565-b1aa-a8e56a7bdd79}">
           <p14:sldIdLst>
             <p14:sldId id="259"/>
             <p14:sldId id="260"/>
@@ -158,7 +158,7 @@
             <p14:sldId id="268"/>
           </p14:sldIdLst>
         </p14:section>
-        <p14:section name="JIJ NU ! — Oefeningen" id="{469315bd-8ec9-1675-10ac-2465e0b30556}">
+        <p14:section name="JIJ NU ! — Oefeningen" id="{c944802d-5272-f8b1-624a-965d25881afd}">
           <p14:sldIdLst>
             <p14:sldId id="269"/>
             <p14:sldId id="270"/>
@@ -175,7 +175,7 @@
             <p14:sldId id="281"/>
           </p14:sldIdLst>
         </p14:section>
-        <p14:section name="Clôture" id="{d6b8cbe6-39b0-154c-28b0-495097189b61}">
+        <p14:section name="Clôture" id="{c5385cf0-a192-6cb1-26e6-c466a56c43b1}">
           <p14:sldIdLst>
             <p14:sldId id="282"/>
           </p14:sldIdLst>

--- a/neerlandais1/powerpoints/Module_21_Groot_of_grote.pptx
+++ b/neerlandais1/powerpoints/Module_21_Groot_of_grote.pptx
@@ -133,18 +133,18 @@
   <p:extLst>
     <p:ext uri="{521415D9-36F7-43E2-AB2F-B90AF26B5E84}">
       <p14:sectionLst xmlns:p14="http://schemas.microsoft.com/office/powerpoint/2010/main">
-        <p14:section name="Ouverture" id="{334c1c4c-690d-6439-0da8-99cab27b901a}">
+        <p14:section name="Ouverture" id="{61caf9c3-61fa-c09b-a8cd-d510ebb25c67}">
           <p14:sldIdLst>
             <p14:sldId id="256"/>
           </p14:sldIdLst>
         </p14:section>
-        <p14:section name="Découvrir" id="{3689254c-ebe3-dfc9-5e64-8f743693e3de}">
+        <p14:section name="Découvrir" id="{803bd1a4-bf93-f853-02ac-52ce8e718c5b}">
           <p14:sldIdLst>
             <p14:sldId id="257"/>
             <p14:sldId id="258"/>
           </p14:sldIdLst>
         </p14:section>
-        <p14:section name="Comprendre" id="{b91b1fe3-1ad6-8565-b1aa-a8e56a7bdd79}">
+        <p14:section name="Comprendre" id="{c751d45b-ddf3-94e9-50bb-1c94b83be2bd}">
           <p14:sldIdLst>
             <p14:sldId id="259"/>
             <p14:sldId id="260"/>
@@ -158,7 +158,7 @@
             <p14:sldId id="268"/>
           </p14:sldIdLst>
         </p14:section>
-        <p14:section name="JIJ NU ! — Oefeningen" id="{c944802d-5272-f8b1-624a-965d25881afd}">
+        <p14:section name="JIJ NU ! — Oefeningen" id="{80fa8353-0d3c-2bb6-caf1-9ebb1ce97167}">
           <p14:sldIdLst>
             <p14:sldId id="269"/>
             <p14:sldId id="270"/>
@@ -175,7 +175,7 @@
             <p14:sldId id="281"/>
           </p14:sldIdLst>
         </p14:section>
-        <p14:section name="Clôture" id="{c5385cf0-a192-6cb1-26e6-c466a56c43b1}">
+        <p14:section name="Clôture" id="{9577200f-5b07-f2e0-fd39-72e13b0d8962}">
           <p14:sldIdLst>
             <p14:sldId id="282"/>
           </p14:sldIdLst>

--- a/neerlandais1/powerpoints/Module_21_Groot_of_grote.pptx
+++ b/neerlandais1/powerpoints/Module_21_Groot_of_grote.pptx
@@ -133,18 +133,18 @@
   <p:extLst>
     <p:ext uri="{521415D9-36F7-43E2-AB2F-B90AF26B5E84}">
       <p14:sectionLst xmlns:p14="http://schemas.microsoft.com/office/powerpoint/2010/main">
-        <p14:section name="Ouverture" id="{61caf9c3-61fa-c09b-a8cd-d510ebb25c67}">
+        <p14:section name="Ouverture" id="{337e968d-05cf-3c28-6529-1477b9317a0a}">
           <p14:sldIdLst>
             <p14:sldId id="256"/>
           </p14:sldIdLst>
         </p14:section>
-        <p14:section name="Découvrir" id="{803bd1a4-bf93-f853-02ac-52ce8e718c5b}">
+        <p14:section name="Découvrir" id="{f8406eca-56cd-c6e2-7d19-ad3701791aaf}">
           <p14:sldIdLst>
             <p14:sldId id="257"/>
             <p14:sldId id="258"/>
           </p14:sldIdLst>
         </p14:section>
-        <p14:section name="Comprendre" id="{c751d45b-ddf3-94e9-50bb-1c94b83be2bd}">
+        <p14:section name="Comprendre" id="{2bfc88f9-cb23-4de6-7cfc-8dc41c379d2b}">
           <p14:sldIdLst>
             <p14:sldId id="259"/>
             <p14:sldId id="260"/>
@@ -158,7 +158,7 @@
             <p14:sldId id="268"/>
           </p14:sldIdLst>
         </p14:section>
-        <p14:section name="JIJ NU ! — Oefeningen" id="{80fa8353-0d3c-2bb6-caf1-9ebb1ce97167}">
+        <p14:section name="JIJ NU ! — Oefeningen" id="{934d610e-365e-002e-9c1c-95d2d29523b1}">
           <p14:sldIdLst>
             <p14:sldId id="269"/>
             <p14:sldId id="270"/>
@@ -175,7 +175,7 @@
             <p14:sldId id="281"/>
           </p14:sldIdLst>
         </p14:section>
-        <p14:section name="Clôture" id="{9577200f-5b07-f2e0-fd39-72e13b0d8962}">
+        <p14:section name="Clôture" id="{c5b4124d-dacf-11f0-7679-81566fbf4f24}">
           <p14:sldIdLst>
             <p14:sldId id="282"/>
           </p14:sldIdLst>
